--- a/backend/test/fixtures/pptx/syllabus.pptx
+++ b/backend/test/fixtures/pptx/syllabus.pptx
@@ -159,7 +159,7 @@
           <a:lstStyle/>
           <a:p>
             <a:r>
-              <a:rPr lang="uk-UA" sz="2200" b="1">
+              <a:rPr lang="uk-UA" sz="3200" b="1">
                 <a:latin typeface="DejaVu Sans"/>
               </a:rPr>
               <a:t>План курсу</a:t>
@@ -214,7 +214,7 @@
           <a:lstStyle/>
           <a:p>
             <a:r>
-              <a:rPr lang="uk-UA" sz="2200" b="1">
+              <a:rPr lang="uk-UA" sz="3200" b="1">
                 <a:latin typeface="DejaVu Sans"/>
               </a:rPr>
               <a:t>Оцінювання</a:t>
@@ -356,7 +356,7 @@
           <a:lstStyle/>
           <a:p>
             <a:r>
-              <a:rPr lang="uk-UA" sz="2200" b="1">
+              <a:rPr lang="uk-UA" sz="3200" b="1">
                 <a:latin typeface="DejaVu Sans"/>
               </a:rPr>
               <a:t>Силабус: Стратегічний менеджмент</a:t>
@@ -441,7 +441,7 @@
           <a:lstStyle/>
           <a:p>
             <a:r>
-              <a:rPr lang="uk-UA" sz="2200" b="1">
+              <a:rPr lang="uk-UA" sz="3200" b="1">
                 <a:latin typeface="DejaVu Sans"/>
               </a:rPr>
               <a:t>Розклад занять</a:t>
@@ -460,7 +460,7 @@
           <a:ext cx="7800000" cy="2400000"/>
         </p:xfrm>
         <a:graphic>
-          <a:graphicData uri="http://schemas.openxmlformats.org/drawingml/2006/main/table">
+          <a:graphicData uri="http://schemas.openxmlformats.org/drawingml/2006/table">
             <a:tbl>
               <a:tblPr firstRow="1"/>
               <a:tblGrid>
